--- a/Development_D2/Guided_Practice/D2-L05_Practice_Room_Comparing_People_and_Clothes.pptx
+++ b/Development_D2/Guided_Practice/D2-L05_Practice_Room_Comparing_People_and_Clothes.pptx
@@ -14861,11 +14861,11 @@
           <a:bodyPr wrap="square" lIns="0" tIns="0" rIns="0" bIns="0" rtlCol="0" anchor="ctr"/>
           <a:lstStyle/>
           <a:p>
-            <a:pPr algn="l" indent="0" marL="0">
-              <a:buNone/>
-            </a:pPr>
-            <a:r>
-              <a:rPr lang="ar-SA" altLang="en-US" sz="2000" b="1" dirty="0">
+            <a:pPr rtl="1" algn="r" indent="0" marL="0">
+              <a:buNone/>
+            </a:pPr>
+            <a:r>
+              <a:rPr lang="ar-SA" altLang="en-US" sz="1600" b="1" dirty="0">
                 <a:solidFill>
                   <a:srgbClr val="1B3B6F"/>
                 </a:solidFill>
@@ -14873,346 +14873,9 @@
                 <a:ea typeface="Amiri" pitchFamily="2" charset="-78"/>
                 <a:cs typeface="Amiri" pitchFamily="2" charset="-78"/>
               </a:rPr>
-              <a:t>أَطْوَلُ</a:t>
-            </a:r>
-            <a:pPr algn="l" indent="0" marL="0">
-              <a:buNone/>
-            </a:pPr>
-            <a:r>
-              <a:rPr lang="en-US" sz="1550" b="1" dirty="0">
-                <a:solidFill>
-                  <a:srgbClr val="1B3B6F"/>
-                </a:solidFill>
-                <a:latin typeface="Calibri" pitchFamily="34" charset="0"/>
-                <a:cs typeface="Amiri" pitchFamily="2" charset="-78"/>
-              </a:rPr>
-              <a:t> · </a:t>
-            </a:r>
-            <a:pPr algn="l" indent="0" marL="0">
-              <a:buNone/>
-            </a:pPr>
-            <a:r>
-              <a:rPr lang="ar-SA" altLang="en-US" sz="2000" b="1" dirty="0">
-                <a:solidFill>
-                  <a:srgbClr val="1B3B6F"/>
-                </a:solidFill>
-                <a:latin typeface="Amiri" pitchFamily="2" charset="-78"/>
-                <a:ea typeface="Amiri" pitchFamily="2" charset="-78"/>
-                <a:cs typeface="Amiri" pitchFamily="2" charset="-78"/>
-              </a:rPr>
-              <a:t>أَقْصَرُ</a:t>
-            </a:r>
-            <a:pPr algn="l" indent="0" marL="0">
-              <a:buNone/>
-            </a:pPr>
-            <a:r>
-              <a:rPr lang="en-US" sz="1550" b="1" dirty="0">
-                <a:solidFill>
-                  <a:srgbClr val="1B3B6F"/>
-                </a:solidFill>
-                <a:latin typeface="Calibri" pitchFamily="34" charset="0"/>
-                <a:cs typeface="Amiri" pitchFamily="2" charset="-78"/>
-              </a:rPr>
-              <a:t>  ·  </a:t>
-            </a:r>
-            <a:pPr algn="l" indent="0" marL="0">
-              <a:buNone/>
-            </a:pPr>
-            <a:r>
-              <a:rPr lang="ar-SA" altLang="en-US" sz="2000" b="1" dirty="0">
-                <a:solidFill>
-                  <a:srgbClr val="1B3B6F"/>
-                </a:solidFill>
-                <a:latin typeface="Amiri" pitchFamily="2" charset="-78"/>
-                <a:ea typeface="Amiri" pitchFamily="2" charset="-78"/>
-                <a:cs typeface="Amiri" pitchFamily="2" charset="-78"/>
-              </a:rPr>
-              <a:t>أَكْبَرُ</a:t>
-            </a:r>
-            <a:pPr algn="l" indent="0" marL="0">
-              <a:buNone/>
-            </a:pPr>
-            <a:r>
-              <a:rPr lang="en-US" sz="1550" b="1" dirty="0">
-                <a:solidFill>
-                  <a:srgbClr val="1B3B6F"/>
-                </a:solidFill>
-                <a:latin typeface="Calibri" pitchFamily="34" charset="0"/>
-                <a:cs typeface="Amiri" pitchFamily="2" charset="-78"/>
-              </a:rPr>
-              <a:t> · </a:t>
-            </a:r>
-            <a:pPr algn="l" indent="0" marL="0">
-              <a:buNone/>
-            </a:pPr>
-            <a:r>
-              <a:rPr lang="ar-SA" altLang="en-US" sz="2000" b="1" dirty="0">
-                <a:solidFill>
-                  <a:srgbClr val="1B3B6F"/>
-                </a:solidFill>
-                <a:latin typeface="Amiri" pitchFamily="2" charset="-78"/>
-                <a:ea typeface="Amiri" pitchFamily="2" charset="-78"/>
-                <a:cs typeface="Amiri" pitchFamily="2" charset="-78"/>
-              </a:rPr>
-              <a:t>أَصْغَرُ</a:t>
-            </a:r>
-            <a:pPr algn="l" indent="0" marL="0">
-              <a:buNone/>
-            </a:pPr>
-            <a:r>
-              <a:rPr lang="en-US" sz="1550" b="1" dirty="0">
-                <a:solidFill>
-                  <a:srgbClr val="1B3B6F"/>
-                </a:solidFill>
-                <a:latin typeface="Calibri" pitchFamily="34" charset="0"/>
-                <a:cs typeface="Amiri" pitchFamily="2" charset="-78"/>
-              </a:rPr>
-              <a:t>  ·  </a:t>
-            </a:r>
-            <a:pPr algn="l" indent="0" marL="0">
-              <a:buNone/>
-            </a:pPr>
-            <a:r>
-              <a:rPr lang="ar-SA" altLang="en-US" sz="2000" b="1" dirty="0">
-                <a:solidFill>
-                  <a:srgbClr val="1B3B6F"/>
-                </a:solidFill>
-                <a:latin typeface="Amiri" pitchFamily="2" charset="-78"/>
-                <a:ea typeface="Amiri" pitchFamily="2" charset="-78"/>
-                <a:cs typeface="Amiri" pitchFamily="2" charset="-78"/>
-              </a:rPr>
-              <a:t>أَرْخَصُ</a:t>
-            </a:r>
-            <a:pPr algn="l" indent="0" marL="0">
-              <a:buNone/>
-            </a:pPr>
-            <a:r>
-              <a:rPr lang="en-US" sz="1550" b="1" dirty="0">
-                <a:solidFill>
-                  <a:srgbClr val="1B3B6F"/>
-                </a:solidFill>
-                <a:latin typeface="Calibri" pitchFamily="34" charset="0"/>
-                <a:cs typeface="Amiri" pitchFamily="2" charset="-78"/>
-              </a:rPr>
-              <a:t> · </a:t>
-            </a:r>
-            <a:pPr algn="l" indent="0" marL="0">
-              <a:buNone/>
-            </a:pPr>
-            <a:r>
-              <a:rPr lang="ar-SA" altLang="en-US" sz="2000" b="1" dirty="0">
-                <a:solidFill>
-                  <a:srgbClr val="1B3B6F"/>
-                </a:solidFill>
-                <a:latin typeface="Amiri" pitchFamily="2" charset="-78"/>
-                <a:ea typeface="Amiri" pitchFamily="2" charset="-78"/>
-                <a:cs typeface="Amiri" pitchFamily="2" charset="-78"/>
-              </a:rPr>
-              <a:t>أَغْلَى</a:t>
-            </a:r>
-            <a:pPr algn="l" indent="0" marL="0">
-              <a:buNone/>
-            </a:pPr>
-            <a:r>
-              <a:rPr lang="en-US" sz="1550" b="1" dirty="0">
-                <a:solidFill>
-                  <a:srgbClr val="1B3B6F"/>
-                </a:solidFill>
-                <a:latin typeface="Calibri" pitchFamily="34" charset="0"/>
-                <a:cs typeface="Amiri" pitchFamily="2" charset="-78"/>
-              </a:rPr>
-              <a:t>  ·  </a:t>
-            </a:r>
-            <a:pPr algn="l" indent="0" marL="0">
-              <a:buNone/>
-            </a:pPr>
-            <a:r>
-              <a:rPr lang="ar-SA" altLang="en-US" sz="2000" b="1" dirty="0">
-                <a:solidFill>
-                  <a:srgbClr val="1B3B6F"/>
-                </a:solidFill>
-                <a:latin typeface="Amiri" pitchFamily="2" charset="-78"/>
-                <a:ea typeface="Amiri" pitchFamily="2" charset="-78"/>
-                <a:cs typeface="Amiri" pitchFamily="2" charset="-78"/>
-              </a:rPr>
-              <a:t>أَجْمَلُ</a:t>
-            </a:r>
-            <a:pPr algn="l" indent="0" marL="0">
-              <a:buNone/>
-            </a:pPr>
-            <a:r>
-              <a:rPr lang="en-US" sz="1550" b="1" dirty="0">
-                <a:solidFill>
-                  <a:srgbClr val="1B3B6F"/>
-                </a:solidFill>
-                <a:latin typeface="Calibri" pitchFamily="34" charset="0"/>
-                <a:cs typeface="Amiri" pitchFamily="2" charset="-78"/>
-              </a:rPr>
-              <a:t> · </a:t>
-            </a:r>
-            <a:pPr algn="l" indent="0" marL="0">
-              <a:buNone/>
-            </a:pPr>
-            <a:r>
-              <a:rPr lang="ar-SA" altLang="en-US" sz="2000" b="1" dirty="0">
-                <a:solidFill>
-                  <a:srgbClr val="1B3B6F"/>
-                </a:solidFill>
-                <a:latin typeface="Amiri" pitchFamily="2" charset="-78"/>
-                <a:ea typeface="Amiri" pitchFamily="2" charset="-78"/>
-                <a:cs typeface="Amiri" pitchFamily="2" charset="-78"/>
-              </a:rPr>
-              <a:t>أَفْضَلُ</a:t>
-            </a:r>
-            <a:pPr algn="l" indent="0" marL="0">
-              <a:buNone/>
-            </a:pPr>
-            <a:r>
-              <a:rPr lang="en-US" sz="1550" b="1" dirty="0">
-                <a:solidFill>
-                  <a:srgbClr val="1B3B6F"/>
-                </a:solidFill>
-                <a:latin typeface="Calibri" pitchFamily="34" charset="0"/>
-                <a:cs typeface="Amiri" pitchFamily="2" charset="-78"/>
-              </a:rPr>
-              <a:t>  ·  </a:t>
-            </a:r>
-            <a:pPr algn="l" indent="0" marL="0">
-              <a:buNone/>
-            </a:pPr>
-            <a:r>
-              <a:rPr lang="ar-SA" altLang="en-US" sz="2000" b="1" dirty="0">
-                <a:solidFill>
-                  <a:srgbClr val="1B3B6F"/>
-                </a:solidFill>
-                <a:latin typeface="Amiri" pitchFamily="2" charset="-78"/>
-                <a:ea typeface="Amiri" pitchFamily="2" charset="-78"/>
-                <a:cs typeface="Amiri" pitchFamily="2" charset="-78"/>
-              </a:rPr>
-              <a:t>أَكْثَرُ</a:t>
-            </a:r>
-            <a:pPr algn="l" indent="0" marL="0">
-              <a:buNone/>
-            </a:pPr>
-            <a:r>
-              <a:rPr lang="en-US" sz="1550" b="1" dirty="0">
-                <a:solidFill>
-                  <a:srgbClr val="1B3B6F"/>
-                </a:solidFill>
-                <a:latin typeface="Calibri" pitchFamily="34" charset="0"/>
-                <a:cs typeface="Amiri" pitchFamily="2" charset="-78"/>
-              </a:rPr>
-              <a:t> + noun  ·  </a:t>
-            </a:r>
-            <a:pPr algn="l" indent="0" marL="0">
-              <a:buNone/>
-            </a:pPr>
-            <a:r>
-              <a:rPr lang="ar-SA" altLang="en-US" sz="2000" b="1" dirty="0">
-                <a:solidFill>
-                  <a:srgbClr val="1B3B6F"/>
-                </a:solidFill>
-                <a:latin typeface="Amiri" pitchFamily="2" charset="-78"/>
-                <a:ea typeface="Amiri" pitchFamily="2" charset="-78"/>
-                <a:cs typeface="Amiri" pitchFamily="2" charset="-78"/>
-              </a:rPr>
-              <a:t>أَقَلُّ</a:t>
-            </a:r>
-            <a:pPr algn="l" indent="0" marL="0">
-              <a:buNone/>
-            </a:pPr>
-            <a:r>
-              <a:rPr lang="en-US" sz="1550" b="1" dirty="0">
-                <a:solidFill>
-                  <a:srgbClr val="1B3B6F"/>
-                </a:solidFill>
-                <a:latin typeface="Calibri" pitchFamily="34" charset="0"/>
-                <a:cs typeface="Amiri" pitchFamily="2" charset="-78"/>
-              </a:rPr>
-              <a:t> + noun  ·  </a:t>
-            </a:r>
-            <a:pPr algn="l" indent="0" marL="0">
-              <a:buNone/>
-            </a:pPr>
-            <a:r>
-              <a:rPr lang="ar-SA" altLang="en-US" sz="2000" b="1" dirty="0">
-                <a:solidFill>
-                  <a:srgbClr val="1B3B6F"/>
-                </a:solidFill>
-                <a:latin typeface="Amiri" pitchFamily="2" charset="-78"/>
-                <a:ea typeface="Amiri" pitchFamily="2" charset="-78"/>
-                <a:cs typeface="Amiri" pitchFamily="2" charset="-78"/>
-              </a:rPr>
-              <a:t>مِثْلُ</a:t>
-            </a:r>
-            <a:pPr algn="l" indent="0" marL="0">
-              <a:buNone/>
-            </a:pPr>
-            <a:r>
-              <a:rPr lang="en-US" sz="1550" b="1" dirty="0">
-                <a:solidFill>
-                  <a:srgbClr val="1B3B6F"/>
-                </a:solidFill>
-                <a:latin typeface="Calibri" pitchFamily="34" charset="0"/>
-                <a:cs typeface="Amiri" pitchFamily="2" charset="-78"/>
-              </a:rPr>
-              <a:t> · </a:t>
-            </a:r>
-            <a:pPr algn="l" indent="0" marL="0">
-              <a:buNone/>
-            </a:pPr>
-            <a:r>
-              <a:rPr lang="ar-SA" altLang="en-US" sz="2000" b="1" dirty="0">
-                <a:solidFill>
-                  <a:srgbClr val="1B3B6F"/>
-                </a:solidFill>
-                <a:latin typeface="Amiri" pitchFamily="2" charset="-78"/>
-                <a:ea typeface="Amiri" pitchFamily="2" charset="-78"/>
-                <a:cs typeface="Amiri" pitchFamily="2" charset="-78"/>
-              </a:rPr>
-              <a:t>بِنَفْسِ الدَّرَجَةِ</a:t>
-            </a:r>
-            <a:pPr algn="l" indent="0" marL="0">
-              <a:buNone/>
-            </a:pPr>
-            <a:r>
-              <a:rPr lang="en-US" sz="1550" b="1" dirty="0">
-                <a:solidFill>
-                  <a:srgbClr val="1B3B6F"/>
-                </a:solidFill>
-                <a:latin typeface="Calibri" pitchFamily="34" charset="0"/>
-                <a:cs typeface="Amiri" pitchFamily="2" charset="-78"/>
-              </a:rPr>
-              <a:t>  ·  </a:t>
-            </a:r>
-            <a:pPr algn="l" indent="0" marL="0">
-              <a:buNone/>
-            </a:pPr>
-            <a:r>
-              <a:rPr lang="ar-SA" altLang="en-US" sz="2000" b="1" dirty="0">
-                <a:solidFill>
-                  <a:srgbClr val="1B3B6F"/>
-                </a:solidFill>
-                <a:latin typeface="Amiri" pitchFamily="2" charset="-78"/>
-                <a:ea typeface="Amiri" pitchFamily="2" charset="-78"/>
-                <a:cs typeface="Amiri" pitchFamily="2" charset="-78"/>
-              </a:rPr>
-              <a:t>أُفَضِّلُ … عَلَى</a:t>
-            </a:r>
-            <a:pPr algn="l" indent="0" marL="0">
-              <a:buNone/>
-            </a:pPr>
-            <a:r>
-              <a:rPr lang="en-US" sz="1550" b="1" dirty="0">
-                <a:solidFill>
-                  <a:srgbClr val="1B3B6F"/>
-                </a:solidFill>
-                <a:latin typeface="Calibri" pitchFamily="34" charset="0"/>
-                <a:cs typeface="Amiri" pitchFamily="2" charset="-78"/>
-              </a:rPr>
-              <a:t> …</a:t>
-            </a:r>
-            <a:endParaRPr lang="en-US" sz="1550" dirty="0"/>
+              <a:t>أَطْوَلُ · أَقْصَرُ  ·  أَكْبَرُ · أَصْغَرُ  ·  أَرْخَصُ · أَغْلَى  ·  أَجْمَلُ · أَفْضَلُ  ·  أَكْثَرُ ثِقَةً  ·  أَقَلُّ صَبْرًا  ·  مِثْلُ · بِنَفْسِ الدَّرَجَةِ  ·  أُفَضِّلُ … عَلَى …</a:t>
+            </a:r>
+            <a:endParaRPr lang="ar-SA" sz="1600" dirty="0"/>
           </a:p>
         </p:txBody>
       </p:sp>
